--- a/figures/Supplemental_Figures/Supp_Figures.pptx
+++ b/figures/Supplemental_Figures/Supp_Figures.pptx
@@ -8,9 +8,10 @@
     <p:sldId id="256" r:id="rId2"/>
     <p:sldId id="260" r:id="rId3"/>
     <p:sldId id="257" r:id="rId4"/>
-    <p:sldId id="258" r:id="rId5"/>
-    <p:sldId id="262" r:id="rId6"/>
-    <p:sldId id="259" r:id="rId7"/>
+    <p:sldId id="263" r:id="rId5"/>
+    <p:sldId id="258" r:id="rId6"/>
+    <p:sldId id="262" r:id="rId7"/>
+    <p:sldId id="259" r:id="rId8"/>
   </p:sldIdLst>
   <p:sldSz cx="6858000" cy="9144000" type="letter"/>
   <p:notesSz cx="6858000" cy="9144000"/>
@@ -248,7 +249,7 @@
           <a:p>
             <a:fld id="{896BD046-B5B4-334B-A6C9-257A188C12A8}" type="datetimeFigureOut">
               <a:rPr lang="en-US" smtClean="0"/>
-              <a:t>9/9/26</a:t>
+              <a:t>10/2/26</a:t>
             </a:fld>
             <a:endParaRPr lang="en-US"/>
           </a:p>
@@ -418,7 +419,7 @@
           <a:p>
             <a:fld id="{896BD046-B5B4-334B-A6C9-257A188C12A8}" type="datetimeFigureOut">
               <a:rPr lang="en-US" smtClean="0"/>
-              <a:t>9/9/26</a:t>
+              <a:t>10/2/26</a:t>
             </a:fld>
             <a:endParaRPr lang="en-US"/>
           </a:p>
@@ -598,7 +599,7 @@
           <a:p>
             <a:fld id="{896BD046-B5B4-334B-A6C9-257A188C12A8}" type="datetimeFigureOut">
               <a:rPr lang="en-US" smtClean="0"/>
-              <a:t>9/9/26</a:t>
+              <a:t>10/2/26</a:t>
             </a:fld>
             <a:endParaRPr lang="en-US"/>
           </a:p>
@@ -768,7 +769,7 @@
           <a:p>
             <a:fld id="{896BD046-B5B4-334B-A6C9-257A188C12A8}" type="datetimeFigureOut">
               <a:rPr lang="en-US" smtClean="0"/>
-              <a:t>9/9/26</a:t>
+              <a:t>10/2/26</a:t>
             </a:fld>
             <a:endParaRPr lang="en-US"/>
           </a:p>
@@ -1014,7 +1015,7 @@
           <a:p>
             <a:fld id="{896BD046-B5B4-334B-A6C9-257A188C12A8}" type="datetimeFigureOut">
               <a:rPr lang="en-US" smtClean="0"/>
-              <a:t>9/9/26</a:t>
+              <a:t>10/2/26</a:t>
             </a:fld>
             <a:endParaRPr lang="en-US"/>
           </a:p>
@@ -1246,7 +1247,7 @@
           <a:p>
             <a:fld id="{896BD046-B5B4-334B-A6C9-257A188C12A8}" type="datetimeFigureOut">
               <a:rPr lang="en-US" smtClean="0"/>
-              <a:t>9/9/26</a:t>
+              <a:t>10/2/26</a:t>
             </a:fld>
             <a:endParaRPr lang="en-US"/>
           </a:p>
@@ -1613,7 +1614,7 @@
           <a:p>
             <a:fld id="{896BD046-B5B4-334B-A6C9-257A188C12A8}" type="datetimeFigureOut">
               <a:rPr lang="en-US" smtClean="0"/>
-              <a:t>9/9/26</a:t>
+              <a:t>10/2/26</a:t>
             </a:fld>
             <a:endParaRPr lang="en-US"/>
           </a:p>
@@ -1731,7 +1732,7 @@
           <a:p>
             <a:fld id="{896BD046-B5B4-334B-A6C9-257A188C12A8}" type="datetimeFigureOut">
               <a:rPr lang="en-US" smtClean="0"/>
-              <a:t>9/9/26</a:t>
+              <a:t>10/2/26</a:t>
             </a:fld>
             <a:endParaRPr lang="en-US"/>
           </a:p>
@@ -1826,7 +1827,7 @@
           <a:p>
             <a:fld id="{896BD046-B5B4-334B-A6C9-257A188C12A8}" type="datetimeFigureOut">
               <a:rPr lang="en-US" smtClean="0"/>
-              <a:t>9/9/26</a:t>
+              <a:t>10/2/26</a:t>
             </a:fld>
             <a:endParaRPr lang="en-US"/>
           </a:p>
@@ -2103,7 +2104,7 @@
           <a:p>
             <a:fld id="{896BD046-B5B4-334B-A6C9-257A188C12A8}" type="datetimeFigureOut">
               <a:rPr lang="en-US" smtClean="0"/>
-              <a:t>9/9/26</a:t>
+              <a:t>10/2/26</a:t>
             </a:fld>
             <a:endParaRPr lang="en-US"/>
           </a:p>
@@ -2360,7 +2361,7 @@
           <a:p>
             <a:fld id="{896BD046-B5B4-334B-A6C9-257A188C12A8}" type="datetimeFigureOut">
               <a:rPr lang="en-US" smtClean="0"/>
-              <a:t>9/9/26</a:t>
+              <a:t>10/2/26</a:t>
             </a:fld>
             <a:endParaRPr lang="en-US"/>
           </a:p>
@@ -2573,7 +2574,7 @@
           <a:p>
             <a:fld id="{896BD046-B5B4-334B-A6C9-257A188C12A8}" type="datetimeFigureOut">
               <a:rPr lang="en-US" smtClean="0"/>
-              <a:t>9/9/26</a:t>
+              <a:t>10/2/26</a:t>
             </a:fld>
             <a:endParaRPr lang="en-US"/>
           </a:p>
@@ -3445,8 +3446,8 @@
         </p:nvSpPr>
         <p:spPr>
           <a:xfrm>
-            <a:off x="-17889" y="335373"/>
-            <a:ext cx="6875889" cy="2143200"/>
+            <a:off x="63116" y="335373"/>
+            <a:ext cx="6743166" cy="2143200"/>
           </a:xfrm>
           <a:prstGeom prst="rect">
             <a:avLst/>
@@ -3502,7 +3503,7 @@
         </p:blipFill>
         <p:spPr>
           <a:xfrm>
-            <a:off x="51718" y="4695157"/>
+            <a:off x="51718" y="4584060"/>
             <a:ext cx="2263342" cy="1508895"/>
           </a:xfrm>
           <a:prstGeom prst="rect">
@@ -3532,7 +3533,7 @@
         </p:blipFill>
         <p:spPr>
           <a:xfrm>
-            <a:off x="2315060" y="4704645"/>
+            <a:off x="2315060" y="4593548"/>
             <a:ext cx="2263343" cy="1508895"/>
           </a:xfrm>
           <a:prstGeom prst="rect">
@@ -3562,7 +3563,7 @@
         </p:blipFill>
         <p:spPr>
           <a:xfrm>
-            <a:off x="4594657" y="4695157"/>
+            <a:off x="4594657" y="4584060"/>
             <a:ext cx="2263343" cy="1508895"/>
           </a:xfrm>
           <a:prstGeom prst="rect">
@@ -3592,7 +3593,7 @@
         </p:blipFill>
         <p:spPr>
           <a:xfrm>
-            <a:off x="63116" y="6178919"/>
+            <a:off x="63116" y="6042184"/>
             <a:ext cx="2263343" cy="1508895"/>
           </a:xfrm>
           <a:prstGeom prst="rect">
@@ -3622,7 +3623,7 @@
         </p:blipFill>
         <p:spPr>
           <a:xfrm>
-            <a:off x="2315060" y="6178919"/>
+            <a:off x="2315060" y="6042184"/>
             <a:ext cx="2263343" cy="1508895"/>
           </a:xfrm>
           <a:prstGeom prst="rect">
@@ -3644,10 +3645,10 @@
         </p:nvGrpSpPr>
         <p:grpSpPr>
           <a:xfrm>
-            <a:off x="63116" y="271072"/>
-            <a:ext cx="6205203" cy="1144066"/>
-            <a:chOff x="598764" y="472573"/>
-            <a:chExt cx="6205203" cy="1144066"/>
+            <a:off x="88754" y="385376"/>
+            <a:ext cx="6179565" cy="1144066"/>
+            <a:chOff x="624402" y="472573"/>
+            <a:chExt cx="6179565" cy="1144066"/>
           </a:xfrm>
         </p:grpSpPr>
         <p:pic>
@@ -3672,7 +3673,7 @@
           </p:blipFill>
           <p:spPr>
             <a:xfrm>
-              <a:off x="598764" y="537139"/>
+              <a:off x="624402" y="537139"/>
               <a:ext cx="1079500" cy="1079500"/>
             </a:xfrm>
             <a:prstGeom prst="rect">
@@ -3975,7 +3976,7 @@
         </p:nvSpPr>
         <p:spPr>
           <a:xfrm>
-            <a:off x="63116" y="4519979"/>
+            <a:off x="63116" y="4408882"/>
             <a:ext cx="645459" cy="307777"/>
           </a:xfrm>
           <a:prstGeom prst="rect">
@@ -4080,7 +4081,7 @@
         </p:nvSpPr>
         <p:spPr>
           <a:xfrm>
-            <a:off x="-42593" y="2485641"/>
+            <a:off x="47715" y="2494886"/>
             <a:ext cx="645459" cy="307777"/>
           </a:xfrm>
           <a:prstGeom prst="rect">
@@ -4116,13 +4117,13 @@
           <p:nvPr>
             <p:extLst>
               <p:ext uri="{D42A27DB-BD31-4B8C-83A1-F6EECF244321}">
-                <p14:modId xmlns:p14="http://schemas.microsoft.com/office/powerpoint/2010/main" val="1507994763"/>
+                <p14:modId xmlns:p14="http://schemas.microsoft.com/office/powerpoint/2010/main" val="3694875170"/>
               </p:ext>
             </p:extLst>
           </p:nvPr>
         </p:nvGraphicFramePr>
         <p:xfrm>
-          <a:off x="500642" y="3122490"/>
+          <a:off x="500642" y="3011393"/>
           <a:ext cx="5838825" cy="1390650"/>
         </p:xfrm>
         <a:graphic>
@@ -4182,7 +4183,7 @@
                   </a:extLst>
                 </a:gridCol>
               </a:tblGrid>
-              <a:tr h="254792">
+              <a:tr h="230864">
                 <a:tc>
                   <a:txBody>
                     <a:bodyPr/>
@@ -4333,7 +4334,7 @@
                   </a:ext>
                 </a:extLst>
               </a:tr>
-              <a:tr h="254792">
+              <a:tr h="230864">
                 <a:tc>
                   <a:txBody>
                     <a:bodyPr/>
@@ -4487,7 +4488,7 @@
                   </a:ext>
                 </a:extLst>
               </a:tr>
-              <a:tr h="254792">
+              <a:tr h="230864">
                 <a:tc>
                   <a:txBody>
                     <a:bodyPr/>
@@ -4641,7 +4642,7 @@
                   </a:ext>
                 </a:extLst>
               </a:tr>
-              <a:tr h="254792">
+              <a:tr h="230864">
                 <a:tc>
                   <a:txBody>
                     <a:bodyPr/>
@@ -4795,7 +4796,7 @@
                   </a:ext>
                 </a:extLst>
               </a:tr>
-              <a:tr h="254792">
+              <a:tr h="230864">
                 <a:tc>
                   <a:txBody>
                     <a:bodyPr/>
@@ -4967,7 +4968,7 @@
         </p:nvSpPr>
         <p:spPr>
           <a:xfrm flipH="1">
-            <a:off x="1657349" y="2632207"/>
+            <a:off x="1657349" y="2521110"/>
             <a:ext cx="3986213" cy="359667"/>
           </a:xfrm>
           <a:prstGeom prst="rtTriangle">
@@ -5013,7 +5014,7 @@
         </p:nvSpPr>
         <p:spPr>
           <a:xfrm>
-            <a:off x="4382159" y="2718338"/>
+            <a:off x="4382159" y="2607241"/>
             <a:ext cx="2125345" cy="276999"/>
           </a:xfrm>
           <a:prstGeom prst="rect">
@@ -5038,12 +5039,42 @@
           </a:p>
         </p:txBody>
       </p:sp>
-      <p:sp>
-        <p:nvSpPr>
-          <p:cNvPr id="24" name="TextBox 23">
+      <p:pic>
+        <p:nvPicPr>
+          <p:cNvPr id="2" name="Picture 1">
             <a:extLst>
               <a:ext uri="{FF2B5EF4-FFF2-40B4-BE49-F238E27FC236}">
-                <a16:creationId xmlns:a16="http://schemas.microsoft.com/office/drawing/2014/main" id="{BD61F4E3-999B-672F-FBB2-1318D82D0E6C}"/>
+                <a16:creationId xmlns:a16="http://schemas.microsoft.com/office/drawing/2014/main" id="{0A4E74CF-6271-435A-E5AC-3E7E1312EBDB}"/>
+              </a:ext>
+            </a:extLst>
+          </p:cNvPr>
+          <p:cNvPicPr>
+            <a:picLocks noChangeAspect="1"/>
+          </p:cNvPicPr>
+          <p:nvPr/>
+        </p:nvPicPr>
+        <p:blipFill>
+          <a:blip r:embed="rId12"/>
+          <a:stretch>
+            <a:fillRect/>
+          </a:stretch>
+        </p:blipFill>
+        <p:spPr>
+          <a:xfrm>
+            <a:off x="137173" y="7598245"/>
+            <a:ext cx="2510544" cy="1555204"/>
+          </a:xfrm>
+          <a:prstGeom prst="rect">
+            <a:avLst/>
+          </a:prstGeom>
+        </p:spPr>
+      </p:pic>
+      <p:sp>
+        <p:nvSpPr>
+          <p:cNvPr id="3" name="TextBox 2">
+            <a:extLst>
+              <a:ext uri="{FF2B5EF4-FFF2-40B4-BE49-F238E27FC236}">
+                <a16:creationId xmlns:a16="http://schemas.microsoft.com/office/drawing/2014/main" id="{8CD17415-71C2-3632-D1A3-0894ED4C4EFC}"/>
               </a:ext>
             </a:extLst>
           </p:cNvPr>
@@ -5052,8 +5083,8 @@
         </p:nvSpPr>
         <p:spPr>
           <a:xfrm>
-            <a:off x="-17889" y="7930981"/>
-            <a:ext cx="6858000" cy="1107996"/>
+            <a:off x="51717" y="7444356"/>
+            <a:ext cx="645459" cy="307777"/>
           </a:xfrm>
           <a:prstGeom prst="rect">
             <a:avLst/>
@@ -5067,18 +5098,8 @@
           <a:lstStyle/>
           <a:p>
             <a:r>
-              <a:rPr lang="en-US" sz="1100" b="1" dirty="0"/>
-              <a:t>Supplemental Figure 2</a:t>
-            </a:r>
-            <a:r>
-              <a:rPr lang="en-US" sz="1100" dirty="0"/>
-              <a:t>. ResNet18 training curves across cross-validation folds (case study 2). </a:t>
-            </a:r>
-          </a:p>
-          <a:p>
-            <a:r>
-              <a:rPr lang="en-US" sz="1100" dirty="0"/>
-              <a:t>(a) Drug sensitivity categorization criteria provided to panel of experts. (b) Rating from expert 1-3, and the consensus (majority voting) for each drug category. (c) Training/validation cross-entropy loss (left axis) and validation balanced accuracy (right axis) across epochs for each of the five outer cross-validation folds (Fold 0–4) used in the image-based drug-response classification; the checkpoint with the best validation balanced accuracy (star) in each fold was reloaded and used for evaluation on that fold's held-out test partition. </a:t>
+              <a:rPr lang="en-US" sz="1400" b="1" dirty="0"/>
+              <a:t>d</a:t>
             </a:r>
           </a:p>
         </p:txBody>
@@ -5097,6 +5118,86 @@
 </file>
 
 <file path=ppt/slides/slide4.xml><?xml version="1.0" encoding="utf-8"?>
+<p:sld xmlns:a="http://schemas.openxmlformats.org/drawingml/2006/main" xmlns:r="http://schemas.openxmlformats.org/officeDocument/2006/relationships" xmlns:p="http://schemas.openxmlformats.org/presentationml/2006/main">
+  <p:cSld>
+    <p:spTree>
+      <p:nvGrpSpPr>
+        <p:cNvPr id="1" name=""/>
+        <p:cNvGrpSpPr/>
+        <p:nvPr/>
+      </p:nvGrpSpPr>
+      <p:grpSpPr>
+        <a:xfrm>
+          <a:off x="0" y="0"/>
+          <a:ext cx="0" cy="0"/>
+          <a:chOff x="0" y="0"/>
+          <a:chExt cx="0" cy="0"/>
+        </a:xfrm>
+      </p:grpSpPr>
+      <p:sp>
+        <p:nvSpPr>
+          <p:cNvPr id="4" name="TextBox 3">
+            <a:extLst>
+              <a:ext uri="{FF2B5EF4-FFF2-40B4-BE49-F238E27FC236}">
+                <a16:creationId xmlns:a16="http://schemas.microsoft.com/office/drawing/2014/main" id="{F8487CAC-511D-CB03-7927-90F639454575}"/>
+              </a:ext>
+            </a:extLst>
+          </p:cNvPr>
+          <p:cNvSpPr txBox="1"/>
+          <p:nvPr/>
+        </p:nvSpPr>
+        <p:spPr>
+          <a:xfrm>
+            <a:off x="0" y="0"/>
+            <a:ext cx="6858000" cy="1446550"/>
+          </a:xfrm>
+          <a:prstGeom prst="rect">
+            <a:avLst/>
+          </a:prstGeom>
+          <a:noFill/>
+        </p:spPr>
+        <p:txBody>
+          <a:bodyPr wrap="square" rtlCol="0">
+            <a:spAutoFit/>
+          </a:bodyPr>
+          <a:lstStyle/>
+          <a:p>
+            <a:r>
+              <a:rPr lang="en-US" sz="1100" b="1" dirty="0"/>
+              <a:t>Supplemental Figure 2</a:t>
+            </a:r>
+            <a:r>
+              <a:rPr lang="en-US" sz="1100" dirty="0"/>
+              <a:t>. ResNet18 training curves across cross-validation folds (case study 2). </a:t>
+            </a:r>
+          </a:p>
+          <a:p>
+            <a:r>
+              <a:rPr lang="en-US" sz="1100" dirty="0"/>
+              <a:t>(a) Drug sensitivity categorization criteria provided to panel of experts. (b) Rating from expert 1-3, and the consensus (majority voting) for each drug category. (c) Training/validation cross-entropy loss (left axis) and validation balanced accuracy (right axis) across epochs for each of the five outer cross-validation folds (Fold 0–4) used in the image-based drug-response classification; the checkpoint with the best validation balanced accuracy (star) in each fold was reloaded and used for evaluation on that fold's held-out test partition. (d) </a:t>
+            </a:r>
+            <a:r>
+              <a:rPr lang="en-CA" sz="1100" dirty="0"/>
+              <a:t>Random Forest feature importance (mean absolute SHAP value, stacked by response category) for the top 10 of thirteen engineered response features, ranked by total mean absolute SHAP across categories.</a:t>
+            </a:r>
+            <a:endParaRPr lang="en-US" sz="1100" dirty="0"/>
+          </a:p>
+        </p:txBody>
+      </p:sp>
+    </p:spTree>
+    <p:extLst>
+      <p:ext uri="{BB962C8B-B14F-4D97-AF65-F5344CB8AC3E}">
+        <p14:creationId xmlns:p14="http://schemas.microsoft.com/office/powerpoint/2010/main" val="1646304796"/>
+      </p:ext>
+    </p:extLst>
+  </p:cSld>
+  <p:clrMapOvr>
+    <a:masterClrMapping/>
+  </p:clrMapOvr>
+</p:sld>
+</file>
+
+<file path=ppt/slides/slide5.xml><?xml version="1.0" encoding="utf-8"?>
 <p:sld xmlns:a="http://schemas.openxmlformats.org/drawingml/2006/main" xmlns:r="http://schemas.openxmlformats.org/officeDocument/2006/relationships" xmlns:p="http://schemas.openxmlformats.org/presentationml/2006/main">
   <p:cSld>
     <p:spTree>
@@ -5546,7 +5647,7 @@
 </p:sld>
 </file>
 
-<file path=ppt/slides/slide5.xml><?xml version="1.0" encoding="utf-8"?>
+<file path=ppt/slides/slide6.xml><?xml version="1.0" encoding="utf-8"?>
 <p:sld xmlns:a="http://schemas.openxmlformats.org/drawingml/2006/main" xmlns:r="http://schemas.openxmlformats.org/officeDocument/2006/relationships" xmlns:p="http://schemas.openxmlformats.org/presentationml/2006/main">
   <p:cSld>
     <p:spTree>
@@ -5662,7 +5763,7 @@
 </p:sld>
 </file>
 
-<file path=ppt/slides/slide6.xml><?xml version="1.0" encoding="utf-8"?>
+<file path=ppt/slides/slide7.xml><?xml version="1.0" encoding="utf-8"?>
 <p:sld xmlns:a="http://schemas.openxmlformats.org/drawingml/2006/main" xmlns:r="http://schemas.openxmlformats.org/officeDocument/2006/relationships" xmlns:p="http://schemas.openxmlformats.org/presentationml/2006/main">
   <p:cSld>
     <p:spTree>

--- a/figures/Supplemental_Figures/Supp_Figures.pptx
+++ b/figures/Supplemental_Figures/Supp_Figures.pptx
@@ -5810,36 +5810,6 @@
           </a:prstGeom>
         </p:spPr>
       </p:pic>
-      <p:pic>
-        <p:nvPicPr>
-          <p:cNvPr id="5" name="Picture 4">
-            <a:extLst>
-              <a:ext uri="{FF2B5EF4-FFF2-40B4-BE49-F238E27FC236}">
-                <a16:creationId xmlns:a16="http://schemas.microsoft.com/office/drawing/2014/main" id="{ACE4B6DF-57C1-20E9-0254-F5E455775A9C}"/>
-              </a:ext>
-            </a:extLst>
-          </p:cNvPr>
-          <p:cNvPicPr>
-            <a:picLocks noChangeAspect="1"/>
-          </p:cNvPicPr>
-          <p:nvPr/>
-        </p:nvPicPr>
-        <p:blipFill>
-          <a:blip r:embed="rId3"/>
-          <a:stretch>
-            <a:fillRect/>
-          </a:stretch>
-        </p:blipFill>
-        <p:spPr>
-          <a:xfrm>
-            <a:off x="255214" y="3086869"/>
-            <a:ext cx="6319114" cy="2892811"/>
-          </a:xfrm>
-          <a:prstGeom prst="rect">
-            <a:avLst/>
-          </a:prstGeom>
-        </p:spPr>
-      </p:pic>
       <p:sp>
         <p:nvSpPr>
           <p:cNvPr id="6" name="TextBox 5">
@@ -5960,7 +5930,7 @@
           <p:nvPr/>
         </p:nvPicPr>
         <p:blipFill>
-          <a:blip r:embed="rId4"/>
+          <a:blip r:embed="rId3"/>
           <a:srcRect l="48438" b="53873"/>
           <a:stretch>
             <a:fillRect/>
@@ -5991,7 +5961,7 @@
           <p:nvPr/>
         </p:nvPicPr>
         <p:blipFill>
-          <a:blip r:embed="rId4"/>
+          <a:blip r:embed="rId3"/>
           <a:srcRect t="46070"/>
           <a:stretch>
             <a:fillRect/>
@@ -6111,7 +6081,7 @@
             </a:r>
             <a:r>
               <a:rPr lang="en-CA" sz="1100" dirty="0"/>
-              <a:t> call (PD/SD/PR/CR; PD and SD collapsed to Resistant, PR and CR to Sensitive for comparison); the two response definitions agree for 76.2% of models (61/80). (c) Full pre-ranked GSEA results (top 6 pathways per direction, FDR q &lt; 0.05) against GO Biological Process, KEGG, and </a:t>
+              <a:t> call (PD/SD/PR/CR; PD and SD collapsed to Resistant, PR and CR to Sensitive for comparison); the two response definitions agree for 76.2% of models (61/80). (c) GSEA results against GO Biological Process, KEGG, and </a:t>
             </a:r>
             <a:r>
               <a:rPr lang="en-CA" sz="1100" dirty="0" err="1"/>
@@ -6119,7 +6089,15 @@
             </a:r>
             <a:r>
               <a:rPr lang="en-CA" sz="1100" dirty="0"/>
-              <a:t> Hallmark gene sets, ranked by Welch's t-statistic (Sensitive vs. Resistant, fixed </a:t>
+              <a:t> Hallmark gene sets, ranked by </a:t>
+            </a:r>
+            <a:r>
+              <a:rPr lang="en-CA" sz="1100" dirty="0" err="1"/>
+              <a:t>limma</a:t>
+            </a:r>
+            <a:r>
+              <a:rPr lang="en-CA" sz="1100" dirty="0"/>
+              <a:t> moderated t-statistics (Sensitive vs. Resistant, fixed </a:t>
             </a:r>
             <a:r>
               <a:rPr lang="en-CA" sz="1100" dirty="0" err="1"/>
@@ -6135,11 +6113,46 @@
             </a:r>
             <a:r>
               <a:rPr lang="en-CA" sz="1100" dirty="0"/>
-              <a:t> transcriptome). Positive NES: enriched in Sensitive models; negative NES: enriched in Resistant models.</a:t>
-            </a:r>
-          </a:p>
-        </p:txBody>
-      </p:sp>
+              <a:t> transcriptome). Positive NES: enriched in Sensitive models; negative NES: enriched in </a:t>
+            </a:r>
+            <a:r>
+              <a:rPr lang="en-CA" sz="1100"/>
+              <a:t>Resistant models (FDR q &lt; 0.05) .</a:t>
+            </a:r>
+            <a:endParaRPr lang="en-CA" sz="1100" dirty="0"/>
+          </a:p>
+        </p:txBody>
+      </p:sp>
+      <p:pic>
+        <p:nvPicPr>
+          <p:cNvPr id="3" name="Picture 2">
+            <a:extLst>
+              <a:ext uri="{FF2B5EF4-FFF2-40B4-BE49-F238E27FC236}">
+                <a16:creationId xmlns:a16="http://schemas.microsoft.com/office/drawing/2014/main" id="{0E0CFC7A-79E4-95A9-59D0-E06126269010}"/>
+              </a:ext>
+            </a:extLst>
+          </p:cNvPr>
+          <p:cNvPicPr>
+            <a:picLocks noChangeAspect="1"/>
+          </p:cNvPicPr>
+          <p:nvPr/>
+        </p:nvPicPr>
+        <p:blipFill>
+          <a:blip r:embed="rId4"/>
+          <a:stretch>
+            <a:fillRect/>
+          </a:stretch>
+        </p:blipFill>
+        <p:spPr>
+          <a:xfrm>
+            <a:off x="0" y="3471518"/>
+            <a:ext cx="6858000" cy="2200963"/>
+          </a:xfrm>
+          <a:prstGeom prst="rect">
+            <a:avLst/>
+          </a:prstGeom>
+        </p:spPr>
+      </p:pic>
     </p:spTree>
     <p:extLst>
       <p:ext uri="{BB962C8B-B14F-4D97-AF65-F5344CB8AC3E}">
